--- a/PackageCam.pptx
+++ b/PackageCam.pptx
@@ -107,6 +107,11 @@
       </a:defRPr>
     </a:lvl9pPr>
   </p:defaultTextStyle>
+  <p:extLst>
+    <p:ext uri="{EFAFB233-063F-42B5-8137-9DF3F51BA10A}">
+      <p15:sldGuideLst xmlns:p15="http://schemas.microsoft.com/office/powerpoint/2012/main"/>
+    </p:ext>
+  </p:extLst>
 </p:presentation>
 </file>
 
@@ -257,7 +262,7 @@
           <a:p>
             <a:fld id="{B71900EF-7BEE-E946-88A7-9ED6C7BE8518}" type="datetimeFigureOut">
               <a:rPr lang="en-US" smtClean="0"/>
-              <a:t>3/10/26</a:t>
+              <a:t>3/11/26</a:t>
             </a:fld>
             <a:endParaRPr lang="en-US"/>
           </a:p>
@@ -455,7 +460,7 @@
           <a:p>
             <a:fld id="{B71900EF-7BEE-E946-88A7-9ED6C7BE8518}" type="datetimeFigureOut">
               <a:rPr lang="en-US" smtClean="0"/>
-              <a:t>3/10/26</a:t>
+              <a:t>3/11/26</a:t>
             </a:fld>
             <a:endParaRPr lang="en-US"/>
           </a:p>
@@ -663,7 +668,7 @@
           <a:p>
             <a:fld id="{B71900EF-7BEE-E946-88A7-9ED6C7BE8518}" type="datetimeFigureOut">
               <a:rPr lang="en-US" smtClean="0"/>
-              <a:t>3/10/26</a:t>
+              <a:t>3/11/26</a:t>
             </a:fld>
             <a:endParaRPr lang="en-US"/>
           </a:p>
@@ -861,7 +866,7 @@
           <a:p>
             <a:fld id="{B71900EF-7BEE-E946-88A7-9ED6C7BE8518}" type="datetimeFigureOut">
               <a:rPr lang="en-US" smtClean="0"/>
-              <a:t>3/10/26</a:t>
+              <a:t>3/11/26</a:t>
             </a:fld>
             <a:endParaRPr lang="en-US"/>
           </a:p>
@@ -1136,7 +1141,7 @@
           <a:p>
             <a:fld id="{B71900EF-7BEE-E946-88A7-9ED6C7BE8518}" type="datetimeFigureOut">
               <a:rPr lang="en-US" smtClean="0"/>
-              <a:t>3/10/26</a:t>
+              <a:t>3/11/26</a:t>
             </a:fld>
             <a:endParaRPr lang="en-US"/>
           </a:p>
@@ -1401,7 +1406,7 @@
           <a:p>
             <a:fld id="{B71900EF-7BEE-E946-88A7-9ED6C7BE8518}" type="datetimeFigureOut">
               <a:rPr lang="en-US" smtClean="0"/>
-              <a:t>3/10/26</a:t>
+              <a:t>3/11/26</a:t>
             </a:fld>
             <a:endParaRPr lang="en-US"/>
           </a:p>
@@ -1813,7 +1818,7 @@
           <a:p>
             <a:fld id="{B71900EF-7BEE-E946-88A7-9ED6C7BE8518}" type="datetimeFigureOut">
               <a:rPr lang="en-US" smtClean="0"/>
-              <a:t>3/10/26</a:t>
+              <a:t>3/11/26</a:t>
             </a:fld>
             <a:endParaRPr lang="en-US"/>
           </a:p>
@@ -1954,7 +1959,7 @@
           <a:p>
             <a:fld id="{B71900EF-7BEE-E946-88A7-9ED6C7BE8518}" type="datetimeFigureOut">
               <a:rPr lang="en-US" smtClean="0"/>
-              <a:t>3/10/26</a:t>
+              <a:t>3/11/26</a:t>
             </a:fld>
             <a:endParaRPr lang="en-US"/>
           </a:p>
@@ -2067,7 +2072,7 @@
           <a:p>
             <a:fld id="{B71900EF-7BEE-E946-88A7-9ED6C7BE8518}" type="datetimeFigureOut">
               <a:rPr lang="en-US" smtClean="0"/>
-              <a:t>3/10/26</a:t>
+              <a:t>3/11/26</a:t>
             </a:fld>
             <a:endParaRPr lang="en-US"/>
           </a:p>
@@ -2378,7 +2383,7 @@
           <a:p>
             <a:fld id="{B71900EF-7BEE-E946-88A7-9ED6C7BE8518}" type="datetimeFigureOut">
               <a:rPr lang="en-US" smtClean="0"/>
-              <a:t>3/10/26</a:t>
+              <a:t>3/11/26</a:t>
             </a:fld>
             <a:endParaRPr lang="en-US"/>
           </a:p>
@@ -2666,7 +2671,7 @@
           <a:p>
             <a:fld id="{B71900EF-7BEE-E946-88A7-9ED6C7BE8518}" type="datetimeFigureOut">
               <a:rPr lang="en-US" smtClean="0"/>
-              <a:t>3/10/26</a:t>
+              <a:t>3/11/26</a:t>
             </a:fld>
             <a:endParaRPr lang="en-US"/>
           </a:p>
@@ -2907,7 +2912,7 @@
           <a:p>
             <a:fld id="{B71900EF-7BEE-E946-88A7-9ED6C7BE8518}" type="datetimeFigureOut">
               <a:rPr lang="en-US" smtClean="0"/>
-              <a:t>3/10/26</a:t>
+              <a:t>3/11/26</a:t>
             </a:fld>
             <a:endParaRPr lang="en-US"/>
           </a:p>
@@ -3310,6 +3315,14 @@
 <file path=ppt/slides/slide1.xml><?xml version="1.0" encoding="utf-8"?>
 <p:sld xmlns:a="http://schemas.openxmlformats.org/drawingml/2006/main" xmlns:r="http://schemas.openxmlformats.org/officeDocument/2006/relationships" xmlns:p="http://schemas.openxmlformats.org/presentationml/2006/main">
   <p:cSld>
+    <p:bg>
+      <p:bgPr>
+        <a:solidFill>
+          <a:srgbClr val="0D1B2A"/>
+        </a:solidFill>
+        <a:effectLst/>
+      </p:bgPr>
+    </p:bg>
     <p:spTree>
       <p:nvGrpSpPr>
         <p:cNvPr id="1" name=""/>
@@ -3326,73 +3339,633 @@
       </p:grpSpPr>
       <p:sp>
         <p:nvSpPr>
-          <p:cNvPr id="2" name="Title 1">
-            <a:extLst>
-              <a:ext uri="{FF2B5EF4-FFF2-40B4-BE49-F238E27FC236}">
-                <a16:creationId xmlns:a16="http://schemas.microsoft.com/office/drawing/2014/main" id="{0CE3B29F-574D-0F54-43B0-E5DE38BB9787}"/>
-              </a:ext>
-            </a:extLst>
-          </p:cNvPr>
-          <p:cNvSpPr>
-            <a:spLocks noGrp="1"/>
-          </p:cNvSpPr>
-          <p:nvPr>
-            <p:ph type="ctrTitle"/>
-          </p:nvPr>
-        </p:nvSpPr>
-        <p:spPr/>
-        <p:txBody>
-          <a:bodyPr>
-            <a:normAutofit fontScale="90000"/>
-          </a:bodyPr>
-          <a:lstStyle/>
-          <a:p>
-            <a:r>
-              <a:rPr lang="en-US" b="1" dirty="0"/>
-              <a:t>AI-Powered Parcel Damage Detection</a:t>
-            </a:r>
-            <a:br>
-              <a:rPr lang="en-US" dirty="0"/>
-            </a:br>
-            <a:endParaRPr lang="en-US" dirty="0"/>
-          </a:p>
-        </p:txBody>
-      </p:sp>
-      <p:sp>
-        <p:nvSpPr>
-          <p:cNvPr id="3" name="Subtitle 2">
-            <a:extLst>
-              <a:ext uri="{FF2B5EF4-FFF2-40B4-BE49-F238E27FC236}">
-                <a16:creationId xmlns:a16="http://schemas.microsoft.com/office/drawing/2014/main" id="{4486AF91-670A-C25F-DD22-E8DA0DD8B9F8}"/>
-              </a:ext>
-            </a:extLst>
-          </p:cNvPr>
-          <p:cNvSpPr>
-            <a:spLocks noGrp="1"/>
-          </p:cNvSpPr>
-          <p:nvPr>
-            <p:ph type="subTitle" idx="1"/>
-          </p:nvPr>
-        </p:nvSpPr>
-        <p:spPr/>
-        <p:txBody>
-          <a:bodyPr/>
-          <a:lstStyle/>
-          <a:p>
-            <a:r>
-              <a:rPr lang="en-US" i="1" dirty="0"/>
-              <a:t>Subtitle: Real-Time Quality Control for High-Speed Conveyor Systems</a:t>
-            </a:r>
-            <a:endParaRPr lang="en-US" dirty="0"/>
+          <p:cNvPr id="10" name="RightAccent"/>
+          <p:cNvSpPr>
+            <a:spLocks noGrp="1"/>
+          </p:cNvSpPr>
+          <p:nvPr/>
+        </p:nvSpPr>
+        <p:spPr>
+          <a:xfrm>
+            <a:off x="7315200" y="0"/>
+            <a:ext cx="1066800" cy="6858000"/>
+          </a:xfrm>
+          <a:prstGeom prst="rect">
+            <a:avLst/>
+          </a:prstGeom>
+          <a:solidFill>
+            <a:srgbClr val="00B4D8"/>
+          </a:solidFill>
+          <a:ln>
+            <a:noFill/>
+          </a:ln>
+        </p:spPr>
+        <p:txBody>
+          <a:bodyPr/>
+          <a:lstStyle/>
+          <a:p>
+            <a:endParaRPr lang="en-US"/>
+          </a:p>
+        </p:txBody>
+      </p:sp>
+      <p:sp>
+        <p:nvSpPr>
+          <p:cNvPr id="11" name="RightInner"/>
+          <p:cNvSpPr>
+            <a:spLocks noGrp="1"/>
+          </p:cNvSpPr>
+          <p:nvPr/>
+        </p:nvSpPr>
+        <p:spPr>
+          <a:xfrm>
+            <a:off x="7467600" y="0"/>
+            <a:ext cx="914400" cy="6858000"/>
+          </a:xfrm>
+          <a:prstGeom prst="rect">
+            <a:avLst/>
+          </a:prstGeom>
+          <a:solidFill>
+            <a:srgbClr val="023E8A"/>
+          </a:solidFill>
+          <a:ln>
+            <a:noFill/>
+          </a:ln>
+        </p:spPr>
+        <p:txBody>
+          <a:bodyPr/>
+          <a:lstStyle/>
+          <a:p>
+            <a:endParaRPr lang="en-US"/>
+          </a:p>
+        </p:txBody>
+      </p:sp>
+      <p:sp>
+        <p:nvSpPr>
+          <p:cNvPr id="12" name="TopBar"/>
+          <p:cNvSpPr>
+            <a:spLocks noGrp="1"/>
+          </p:cNvSpPr>
+          <p:nvPr/>
+        </p:nvSpPr>
+        <p:spPr>
+          <a:xfrm>
+            <a:off x="457200" y="457200"/>
+            <a:ext cx="2743200" cy="76200"/>
+          </a:xfrm>
+          <a:prstGeom prst="rect">
+            <a:avLst/>
+          </a:prstGeom>
+          <a:solidFill>
+            <a:srgbClr val="00B4D8"/>
+          </a:solidFill>
+          <a:ln>
+            <a:noFill/>
+          </a:ln>
+        </p:spPr>
+        <p:txBody>
+          <a:bodyPr/>
+          <a:lstStyle/>
+          <a:p>
+            <a:endParaRPr lang="en-US"/>
+          </a:p>
+        </p:txBody>
+      </p:sp>
+      <p:sp>
+        <p:nvSpPr>
+          <p:cNvPr id="13" name="OverlineLabel"/>
+          <p:cNvSpPr>
+            <a:spLocks noGrp="1"/>
+          </p:cNvSpPr>
+          <p:nvPr/>
+        </p:nvSpPr>
+        <p:spPr>
+          <a:xfrm>
+            <a:off x="457200" y="609600"/>
+            <a:ext cx="6629400" cy="381000"/>
+          </a:xfrm>
+          <a:prstGeom prst="rect">
+            <a:avLst/>
+          </a:prstGeom>
+          <a:noFill/>
+          <a:ln>
+            <a:noFill/>
+          </a:ln>
+        </p:spPr>
+        <p:txBody>
+          <a:bodyPr lIns="0" tIns="0" rIns="0" bIns="0" anchor="ctr"/>
+          <a:lstStyle/>
+          <a:p>
+            <a:pPr algn="l"/>
+            <a:r>
+              <a:rPr lang="en-US" sz="1400" b="0" spc="300" dirty="0">
+                <a:solidFill>
+                  <a:srgbClr val="00B4D8"/>
+                </a:solidFill>
+                <a:latin typeface="Calibri" panose="020F0502020204030204" pitchFamily="34" charset="0"/>
+              </a:rPr>
+              <a:t>PACKAGECAM  •  AI VISION SYSTEM</a:t>
+            </a:r>
+          </a:p>
+        </p:txBody>
+      </p:sp>
+      <p:sp>
+        <p:nvSpPr>
+          <p:cNvPr id="2" name="MainTitle"/>
+          <p:cNvSpPr>
+            <a:spLocks noGrp="1"/>
+          </p:cNvSpPr>
+          <p:nvPr/>
+        </p:nvSpPr>
+        <p:spPr>
+          <a:xfrm>
+            <a:off x="457200" y="1066800"/>
+            <a:ext cx="6629400" cy="1905000"/>
+          </a:xfrm>
+          <a:prstGeom prst="rect">
+            <a:avLst/>
+          </a:prstGeom>
+          <a:noFill/>
+          <a:ln>
+            <a:noFill/>
+          </a:ln>
+        </p:spPr>
+        <p:txBody>
+          <a:bodyPr wrap="square" lIns="0" tIns="0" rIns="0" bIns="0" anchor="t"/>
+          <a:lstStyle/>
+          <a:p>
+            <a:pPr marL="0" indent="0" algn="l"/>
+            <a:r>
+              <a:rPr lang="en-US" sz="5400" b="1" dirty="0">
+                <a:solidFill>
+                  <a:srgbClr val="FFFFFF"/>
+                </a:solidFill>
+                <a:latin typeface="Calibri" panose="020F0502020204030204" pitchFamily="34" charset="0"/>
+              </a:rPr>
+              <a:t>AI-Powered Parcel</a:t>
+            </a:r>
+          </a:p>
+          <a:p>
+            <a:pPr marL="0" indent="0" algn="l"/>
+            <a:r>
+              <a:rPr lang="en-US" sz="5400" b="1" dirty="0">
+                <a:solidFill>
+                  <a:srgbClr val="00B4D8"/>
+                </a:solidFill>
+                <a:latin typeface="Calibri" panose="020F0502020204030204" pitchFamily="34" charset="0"/>
+              </a:rPr>
+              <a:t>Damage Detection</a:t>
+            </a:r>
+          </a:p>
+        </p:txBody>
+      </p:sp>
+      <p:sp>
+        <p:nvSpPr>
+          <p:cNvPr id="3" name="Subtitle"/>
+          <p:cNvSpPr>
+            <a:spLocks noGrp="1"/>
+          </p:cNvSpPr>
+          <p:nvPr/>
+        </p:nvSpPr>
+        <p:spPr>
+          <a:xfrm>
+            <a:off x="457200" y="3047100"/>
+            <a:ext cx="6629400" cy="457200"/>
+          </a:xfrm>
+          <a:prstGeom prst="rect">
+            <a:avLst/>
+          </a:prstGeom>
+          <a:noFill/>
+          <a:ln>
+            <a:noFill/>
+          </a:ln>
+        </p:spPr>
+        <p:txBody>
+          <a:bodyPr lIns="0" tIns="0" rIns="0" bIns="0" anchor="t"/>
+          <a:lstStyle/>
+          <a:p>
+            <a:pPr algn="l"/>
+            <a:r>
+              <a:rPr lang="en-US" sz="1800" b="0" dirty="0">
+                <a:solidFill>
+                  <a:srgbClr val="90E0EF"/>
+                </a:solidFill>
+                <a:latin typeface="Calibri" panose="020F0502020204030204" pitchFamily="34" charset="0"/>
+              </a:rPr>
+              <a:t>Real-Time Quality Control for High-Speed Conveyor Systems</a:t>
+            </a:r>
+          </a:p>
+        </p:txBody>
+      </p:sp>
+      <p:sp>
+        <p:nvSpPr>
+          <p:cNvPr id="14" name="Divider"/>
+          <p:cNvSpPr>
+            <a:spLocks noGrp="1"/>
+          </p:cNvSpPr>
+          <p:nvPr/>
+        </p:nvSpPr>
+        <p:spPr>
+          <a:xfrm>
+            <a:off x="457200" y="3581400"/>
+            <a:ext cx="2743200" cy="50800"/>
+          </a:xfrm>
+          <a:prstGeom prst="rect">
+            <a:avLst/>
+          </a:prstGeom>
+          <a:solidFill>
+            <a:srgbClr val="90E0EF"/>
+          </a:solidFill>
+          <a:ln>
+            <a:noFill/>
+          </a:ln>
+        </p:spPr>
+        <p:txBody>
+          <a:bodyPr/>
+          <a:lstStyle/>
+          <a:p>
+            <a:endParaRPr lang="en-US"/>
+          </a:p>
+        </p:txBody>
+      </p:sp>
+      <p:sp>
+        <p:nvSpPr>
+          <p:cNvPr id="20" name="Tag1Bg"/>
+          <p:cNvSpPr>
+            <a:spLocks noGrp="1"/>
+          </p:cNvSpPr>
+          <p:nvPr/>
+        </p:nvSpPr>
+        <p:spPr>
+          <a:xfrm>
+            <a:off x="457200" y="3810000"/>
+            <a:ext cx="1600200" cy="457200"/>
+          </a:xfrm>
+          <a:prstGeom prst="roundRect">
+            <a:avLst>
+              <a:gd name="adj" fmla="val 20000"/>
+            </a:avLst>
+          </a:prstGeom>
+          <a:solidFill>
+            <a:srgbClr val="023E8A"/>
+          </a:solidFill>
+          <a:ln>
+            <a:solidFill>
+              <a:srgbClr val="00B4D8"/>
+            </a:solidFill>
+            <a:round/>
+          </a:ln>
+        </p:spPr>
+        <p:txBody>
+          <a:bodyPr lIns="91440" tIns="0" rIns="91440" bIns="0" anchor="ctr"/>
+          <a:lstStyle/>
+          <a:p>
+            <a:pPr algn="ctr"/>
+            <a:r>
+              <a:rPr lang="en-US" sz="1100" b="1" dirty="0">
+                <a:solidFill>
+                  <a:srgbClr val="00B4D8"/>
+                </a:solidFill>
+                <a:latin typeface="Calibri"/>
+              </a:rPr>
+              <a:t>YOLOv8 Detection</a:t>
+            </a:r>
+          </a:p>
+        </p:txBody>
+      </p:sp>
+      <p:sp>
+        <p:nvSpPr>
+          <p:cNvPr id="21" name="Tag2Bg"/>
+          <p:cNvSpPr>
+            <a:spLocks noGrp="1"/>
+          </p:cNvSpPr>
+          <p:nvPr/>
+        </p:nvSpPr>
+        <p:spPr>
+          <a:xfrm>
+            <a:off x="2133600" y="3810000"/>
+            <a:ext cx="1600200" cy="457200"/>
+          </a:xfrm>
+          <a:prstGeom prst="roundRect">
+            <a:avLst>
+              <a:gd name="adj" fmla="val 20000"/>
+            </a:avLst>
+          </a:prstGeom>
+          <a:solidFill>
+            <a:srgbClr val="023E8A"/>
+          </a:solidFill>
+          <a:ln>
+            <a:solidFill>
+              <a:srgbClr val="00B4D8"/>
+            </a:solidFill>
+            <a:round/>
+          </a:ln>
+        </p:spPr>
+        <p:txBody>
+          <a:bodyPr lIns="91440" tIns="0" rIns="91440" bIns="0" anchor="ctr"/>
+          <a:lstStyle/>
+          <a:p>
+            <a:pPr algn="ctr"/>
+            <a:r>
+              <a:rPr lang="en-US" sz="1100" b="1" dirty="0">
+                <a:solidFill>
+                  <a:srgbClr val="00B4D8"/>
+                </a:solidFill>
+                <a:latin typeface="Calibri"/>
+              </a:rPr>
+              <a:t>NVIDIA A100 Training</a:t>
+            </a:r>
+          </a:p>
+        </p:txBody>
+      </p:sp>
+      <p:sp>
+        <p:nvSpPr>
+          <p:cNvPr id="22" name="Tag3Bg"/>
+          <p:cNvSpPr>
+            <a:spLocks noGrp="1"/>
+          </p:cNvSpPr>
+          <p:nvPr/>
+        </p:nvSpPr>
+        <p:spPr>
+          <a:xfrm>
+            <a:off x="3810000" y="3810000"/>
+            <a:ext cx="1600200" cy="457200"/>
+          </a:xfrm>
+          <a:prstGeom prst="roundRect">
+            <a:avLst>
+              <a:gd name="adj" fmla="val 20000"/>
+            </a:avLst>
+          </a:prstGeom>
+          <a:solidFill>
+            <a:srgbClr val="023E8A"/>
+          </a:solidFill>
+          <a:ln>
+            <a:solidFill>
+              <a:srgbClr val="00B4D8"/>
+            </a:solidFill>
+            <a:round/>
+          </a:ln>
+        </p:spPr>
+        <p:txBody>
+          <a:bodyPr lIns="91440" tIns="0" rIns="91440" bIns="0" anchor="ctr"/>
+          <a:lstStyle/>
+          <a:p>
+            <a:pPr algn="ctr"/>
+            <a:r>
+              <a:rPr lang="en-US" sz="1100" b="1" dirty="0">
+                <a:solidFill>
+                  <a:srgbClr val="00B4D8"/>
+                </a:solidFill>
+                <a:latin typeface="Calibri"/>
+              </a:rPr>
+              <a:t>Jetson Orin Deploy</a:t>
+            </a:r>
+          </a:p>
+        </p:txBody>
+      </p:sp>
+      <p:sp>
+        <p:nvSpPr>
+          <p:cNvPr id="30" name="StatsBg"/>
+          <p:cNvSpPr>
+            <a:spLocks noGrp="1"/>
+          </p:cNvSpPr>
+          <p:nvPr/>
+        </p:nvSpPr>
+        <p:spPr>
+          <a:xfrm>
+            <a:off x="0" y="5486400"/>
+            <a:ext cx="8382000" cy="1371600"/>
+          </a:xfrm>
+          <a:prstGeom prst="rect">
+            <a:avLst/>
+          </a:prstGeom>
+          <a:solidFill>
+            <a:srgbClr val="023E8A"/>
+          </a:solidFill>
+          <a:ln>
+            <a:noFill/>
+          </a:ln>
+        </p:spPr>
+        <p:txBody>
+          <a:bodyPr/>
+          <a:lstStyle/>
+          <a:p>
+            <a:endParaRPr lang="en-US"/>
+          </a:p>
+        </p:txBody>
+      </p:sp>
+      <p:sp>
+        <p:nvSpPr>
+          <p:cNvPr id="31" name="Stat1"/>
+          <p:cNvSpPr>
+            <a:spLocks noGrp="1"/>
+          </p:cNvSpPr>
+          <p:nvPr/>
+        </p:nvSpPr>
+        <p:spPr>
+          <a:xfrm>
+            <a:off x="457200" y="5562600"/>
+            <a:ext cx="2133600" cy="1219200"/>
+          </a:xfrm>
+          <a:prstGeom prst="rect">
+            <a:avLst/>
+          </a:prstGeom>
+          <a:noFill/>
+          <a:ln>
+            <a:noFill/>
+          </a:ln>
+        </p:spPr>
+        <p:txBody>
+          <a:bodyPr lIns="0" tIns="0" rIns="0" bIns="0" anchor="ctr"/>
+          <a:lstStyle/>
+          <a:p>
+            <a:pPr algn="ctr"/>
+            <a:r>
+              <a:rPr lang="en-US" sz="3600" b="1" dirty="0">
+                <a:solidFill>
+                  <a:srgbClr val="00B4D8"/>
+                </a:solidFill>
+                <a:latin typeface="Calibri"/>
+              </a:rPr>
+              <a:t>10,000+</a:t>
+            </a:r>
+          </a:p>
+          <a:p>
+            <a:pPr algn="ctr"/>
+            <a:r>
+              <a:rPr lang="en-US" sz="1100" b="0" dirty="0">
+                <a:solidFill>
+                  <a:srgbClr val="CAF0F8"/>
+                </a:solidFill>
+                <a:latin typeface="Calibri"/>
+              </a:rPr>
+              <a:t>Training Images</a:t>
+            </a:r>
+          </a:p>
+        </p:txBody>
+      </p:sp>
+      <p:sp>
+        <p:nvSpPr>
+          <p:cNvPr id="35" name="VDiv1"/>
+          <p:cNvSpPr>
+            <a:spLocks noGrp="1"/>
+          </p:cNvSpPr>
+          <p:nvPr/>
+        </p:nvSpPr>
+        <p:spPr>
+          <a:xfrm>
+            <a:off x="2743200" y="5638800"/>
+            <a:ext cx="50800" cy="1066800"/>
+          </a:xfrm>
+          <a:prstGeom prst="rect">
+            <a:avLst/>
+          </a:prstGeom>
+          <a:solidFill>
+            <a:srgbClr val="00B4D8"/>
+          </a:solidFill>
+          <a:ln>
+            <a:noFill/>
+          </a:ln>
+        </p:spPr>
+        <p:txBody>
+          <a:bodyPr/>
+          <a:lstStyle/>
+          <a:p>
+            <a:endParaRPr lang="en-US"/>
+          </a:p>
+        </p:txBody>
+      </p:sp>
+      <p:sp>
+        <p:nvSpPr>
+          <p:cNvPr id="32" name="Stat2"/>
+          <p:cNvSpPr>
+            <a:spLocks noGrp="1"/>
+          </p:cNvSpPr>
+          <p:nvPr/>
+        </p:nvSpPr>
+        <p:spPr>
+          <a:xfrm>
+            <a:off x="2895600" y="5562600"/>
+            <a:ext cx="2133600" cy="1219200"/>
+          </a:xfrm>
+          <a:prstGeom prst="rect">
+            <a:avLst/>
+          </a:prstGeom>
+          <a:noFill/>
+          <a:ln>
+            <a:noFill/>
+          </a:ln>
+        </p:spPr>
+        <p:txBody>
+          <a:bodyPr lIns="0" tIns="0" rIns="0" bIns="0" anchor="ctr"/>
+          <a:lstStyle/>
+          <a:p>
+            <a:pPr algn="ctr"/>
+            <a:r>
+              <a:rPr lang="en-US" sz="3600" b="1" dirty="0">
+                <a:solidFill>
+                  <a:srgbClr val="00B4D8"/>
+                </a:solidFill>
+                <a:latin typeface="Calibri"/>
+              </a:rPr>
+              <a:t>Real-Time</a:t>
+            </a:r>
+          </a:p>
+          <a:p>
+            <a:pPr algn="ctr"/>
+            <a:r>
+              <a:rPr lang="en-US" sz="1100" b="0" dirty="0">
+                <a:solidFill>
+                  <a:srgbClr val="CAF0F8"/>
+                </a:solidFill>
+                <a:latin typeface="Calibri"/>
+              </a:rPr>
+              <a:t>Inference on Edge</a:t>
+            </a:r>
+          </a:p>
+        </p:txBody>
+      </p:sp>
+      <p:sp>
+        <p:nvSpPr>
+          <p:cNvPr id="36" name="VDiv2"/>
+          <p:cNvSpPr>
+            <a:spLocks noGrp="1"/>
+          </p:cNvSpPr>
+          <p:nvPr/>
+        </p:nvSpPr>
+        <p:spPr>
+          <a:xfrm>
+            <a:off x="5181000" y="5638800"/>
+            <a:ext cx="50800" cy="1066800"/>
+          </a:xfrm>
+          <a:prstGeom prst="rect">
+            <a:avLst/>
+          </a:prstGeom>
+          <a:solidFill>
+            <a:srgbClr val="00B4D8"/>
+          </a:solidFill>
+          <a:ln>
+            <a:noFill/>
+          </a:ln>
+        </p:spPr>
+        <p:txBody>
+          <a:bodyPr/>
+          <a:lstStyle/>
+          <a:p>
+            <a:endParaRPr lang="en-US"/>
+          </a:p>
+        </p:txBody>
+      </p:sp>
+      <p:sp>
+        <p:nvSpPr>
+          <p:cNvPr id="33" name="Stat3"/>
+          <p:cNvSpPr>
+            <a:spLocks noGrp="1"/>
+          </p:cNvSpPr>
+          <p:nvPr/>
+        </p:nvSpPr>
+        <p:spPr>
+          <a:xfrm>
+            <a:off x="5182800" y="5562600"/>
+            <a:ext cx="2743200" cy="1219200"/>
+          </a:xfrm>
+          <a:prstGeom prst="rect">
+            <a:avLst/>
+          </a:prstGeom>
+          <a:noFill/>
+          <a:ln>
+            <a:noFill/>
+          </a:ln>
+        </p:spPr>
+        <p:txBody>
+          <a:bodyPr lIns="0" tIns="0" rIns="0" bIns="0" anchor="ctr"/>
+          <a:lstStyle/>
+          <a:p>
+            <a:pPr algn="ctr"/>
+            <a:r>
+              <a:rPr lang="en-US" sz="2400" b="1" dirty="0">
+                <a:solidFill>
+                  <a:srgbClr val="00B4D8"/>
+                </a:solidFill>
+                <a:latin typeface="Calibri"/>
+              </a:rPr>
+              <a:t>ONNX + TensorRT</a:t>
+            </a:r>
+          </a:p>
+          <a:p>
+            <a:pPr algn="ctr"/>
+            <a:r>
+              <a:rPr lang="en-US" sz="1100" b="0" dirty="0">
+                <a:solidFill>
+                  <a:srgbClr val="CAF0F8"/>
+                </a:solidFill>
+                <a:latin typeface="Calibri"/>
+              </a:rPr>
+              <a:t>Optimised Export</a:t>
+            </a:r>
           </a:p>
         </p:txBody>
       </p:sp>
     </p:spTree>
-    <p:extLst>
-      <p:ext uri="{BB962C8B-B14F-4D97-AF65-F5344CB8AC3E}">
-        <p14:creationId xmlns:p14="http://schemas.microsoft.com/office/powerpoint/2010/main" val="4031606218"/>
-      </p:ext>
-    </p:extLst>
   </p:cSld>
   <p:clrMapOvr>
     <a:masterClrMapping/>
